--- a/docs/PITCH_DECK.pptx
+++ b/docs/PITCH_DECK.pptx
@@ -3305,7 +3305,7 @@
       </p:sp>
       <p:pic>
         <p:nvPicPr>
-          <p:cNvPr id="6" name="Picture 5" descr="cfa7172b21cb662e.png"/>
+          <p:cNvPr id="6" name="Picture 5" descr="6ed79a6a68b4545a.png"/>
           <p:cNvPicPr>
             <a:picLocks noChangeAspect="1"/>
           </p:cNvPicPr>
@@ -4106,6 +4106,57 @@
               <a:t>     立绘由文生图产出，带提示词/模型/时间戳</a:t>
             </a:r>
           </a:p>
+          <a:p>
+            <a:pPr>
+              <a:spcAft>
+                <a:spcPts val="800"/>
+              </a:spcAft>
+            </a:pPr>
+            <a:r>
+              <a:rPr sz="1500" b="1">
+                <a:solidFill>
+                  <a:srgbClr val="2F6F5B"/>
+                </a:solidFill>
+                <a:latin typeface="微软雅黑"/>
+                <a:ea typeface="微软雅黑"/>
+              </a:rPr>
+              <a:t>5  一句话生成完整开场</a:t>
+            </a:r>
+          </a:p>
+          <a:p>
+            <a:pPr>
+              <a:spcAft>
+                <a:spcPts val="800"/>
+              </a:spcAft>
+            </a:pPr>
+            <a:r>
+              <a:rPr sz="1200" b="0">
+                <a:solidFill>
+                  <a:srgbClr val="232B27"/>
+                </a:solidFill>
+                <a:latin typeface="微软雅黑"/>
+                <a:ea typeface="微软雅黑"/>
+              </a:rPr>
+              <a:t>     模型产出剧名/区域/角色/道具/事实 + 舞台布局；</a:t>
+            </a:r>
+          </a:p>
+          <a:p>
+            <a:pPr>
+              <a:spcAft>
+                <a:spcPts val="800"/>
+              </a:spcAft>
+            </a:pPr>
+            <a:r>
+              <a:rPr sz="1200" b="0">
+                <a:solidFill>
+                  <a:srgbClr val="232B27"/>
+                </a:solidFill>
+                <a:latin typeface="微软雅黑"/>
+                <a:ea typeface="微软雅黑"/>
+              </a:rPr>
+              <a:t>     华山→室外山景，游轮→驾驶舱，来源如实标注</a:t>
+            </a:r>
+          </a:p>
         </p:txBody>
       </p:sp>
       <p:sp>
@@ -4331,6 +4382,57 @@
                 <a:ea typeface="微软雅黑"/>
               </a:rPr>
               <a:t>     backdrops and portraits with provenance</a:t>
+            </a:r>
+          </a:p>
+          <a:p>
+            <a:pPr>
+              <a:spcAft>
+                <a:spcPts val="800"/>
+              </a:spcAft>
+            </a:pPr>
+            <a:r>
+              <a:rPr sz="1300" b="1">
+                <a:solidFill>
+                  <a:srgbClr val="2F6F5B"/>
+                </a:solidFill>
+                <a:latin typeface="微软雅黑"/>
+                <a:ea typeface="微软雅黑"/>
+              </a:rPr>
+              <a:t>5  One line to a full opening</a:t>
+            </a:r>
+          </a:p>
+          <a:p>
+            <a:pPr>
+              <a:spcAft>
+                <a:spcPts val="800"/>
+              </a:spcAft>
+            </a:pPr>
+            <a:r>
+              <a:rPr sz="1100" b="0">
+                <a:solidFill>
+                  <a:srgbClr val="232B27"/>
+                </a:solidFill>
+                <a:latin typeface="微软雅黑"/>
+                <a:ea typeface="微软雅黑"/>
+              </a:rPr>
+              <a:t>     title, areas, cast, props, facts + stage layout;</a:t>
+            </a:r>
+          </a:p>
+          <a:p>
+            <a:pPr>
+              <a:spcAft>
+                <a:spcPts val="800"/>
+              </a:spcAft>
+            </a:pPr>
+            <a:r>
+              <a:rPr sz="1100" b="0">
+                <a:solidFill>
+                  <a:srgbClr val="232B27"/>
+                </a:solidFill>
+                <a:latin typeface="微软雅黑"/>
+                <a:ea typeface="微软雅黑"/>
+              </a:rPr>
+              <a:t>     mountain vs ship bridge, source labelled</a:t>
             </a:r>
           </a:p>
         </p:txBody>
@@ -5020,7 +5122,24 @@
                 <a:latin typeface="微软雅黑"/>
                 <a:ea typeface="微软雅黑"/>
               </a:rPr>
-              <a:t>建场景 → 推进一步 → 点事件看「提议→检查→结果」</a:t>
+              <a:t>输一句想法 → 模型生成完整开场 → 确认建场景</a:t>
+            </a:r>
+          </a:p>
+          <a:p>
+            <a:pPr>
+              <a:spcAft>
+                <a:spcPts val="800"/>
+              </a:spcAft>
+            </a:pPr>
+            <a:r>
+              <a:rPr sz="1200" b="0">
+                <a:solidFill>
+                  <a:srgbClr val="232B27"/>
+                </a:solidFill>
+                <a:latin typeface="微软雅黑"/>
+                <a:ea typeface="微软雅黑"/>
+              </a:rPr>
+              <a:t>推进一步 → 点事件看「提议→检查→结果」</a:t>
             </a:r>
           </a:p>
           <a:p>

--- a/docs/PITCH_DECK.pptx
+++ b/docs/PITCH_DECK.pptx
@@ -3305,7 +3305,7 @@
       </p:sp>
       <p:pic>
         <p:nvPicPr>
-          <p:cNvPr id="6" name="Picture 5" descr="6ed79a6a68b4545a.png"/>
+          <p:cNvPr id="6" name="Picture 5" descr="79b62ef118c5129b.png"/>
           <p:cNvPicPr>
             <a:picLocks noChangeAspect="1"/>
           </p:cNvPicPr>
@@ -3916,41 +3916,41 @@
                 <a:latin typeface="微软雅黑"/>
                 <a:ea typeface="微软雅黑"/>
               </a:rPr>
-              <a:t>1  看得见 Agent 怎么演</a:t>
-            </a:r>
-          </a:p>
-          <a:p>
-            <a:pPr>
-              <a:spcAft>
-                <a:spcPts val="800"/>
-              </a:spcAft>
-            </a:pPr>
-            <a:r>
-              <a:rPr sz="1200" b="0">
-                <a:solidFill>
-                  <a:srgbClr val="232B27"/>
-                </a:solidFill>
-                <a:latin typeface="微软雅黑"/>
-                <a:ea typeface="微软雅黑"/>
-              </a:rPr>
-              <a:t>     2.5D 状态地图 + three.js 舞台；点事件看</a:t>
-            </a:r>
-          </a:p>
-          <a:p>
-            <a:pPr>
-              <a:spcAft>
-                <a:spcPts val="800"/>
-              </a:spcAft>
-            </a:pPr>
-            <a:r>
-              <a:rPr sz="1200" b="0">
-                <a:solidFill>
-                  <a:srgbClr val="232B27"/>
-                </a:solidFill>
-                <a:latin typeface="微软雅黑"/>
-                <a:ea typeface="微软雅黑"/>
-              </a:rPr>
-              <a:t>     提议 → 检查 → 最终动作 → 状态变化</a:t>
+              <a:t>1  剧情结构层</a:t>
+            </a:r>
+          </a:p>
+          <a:p>
+            <a:pPr>
+              <a:spcAft>
+                <a:spcPts val="800"/>
+              </a:spcAft>
+            </a:pPr>
+            <a:r>
+              <a:rPr sz="1150" b="0">
+                <a:solidFill>
+                  <a:srgbClr val="232B27"/>
+                </a:solidFill>
+                <a:latin typeface="微软雅黑"/>
+                <a:ea typeface="微软雅黑"/>
+              </a:rPr>
+              <a:t>     本场契约 + 5 个剧情节拍 + 8 项剧情检查</a:t>
+            </a:r>
+          </a:p>
+          <a:p>
+            <a:pPr>
+              <a:spcAft>
+                <a:spcPts val="800"/>
+              </a:spcAft>
+            </a:pPr>
+            <a:r>
+              <a:rPr sz="1150" b="0">
+                <a:solidFill>
+                  <a:srgbClr val="232B27"/>
+                </a:solidFill>
+                <a:latin typeface="微软雅黑"/>
+                <a:ea typeface="微软雅黑"/>
+              </a:rPr>
+              <a:t>     把轮流说话变成有冲突有收尾的一场戏</a:t>
             </a:r>
           </a:p>
           <a:p>
@@ -3967,41 +3967,41 @@
                 <a:latin typeface="微软雅黑"/>
                 <a:ea typeface="微软雅黑"/>
               </a:rPr>
-              <a:t>2  剧情事实透镜</a:t>
-            </a:r>
-          </a:p>
-          <a:p>
-            <a:pPr>
-              <a:spcAft>
-                <a:spcPts val="800"/>
-              </a:spcAft>
-            </a:pPr>
-            <a:r>
-              <a:rPr sz="1200" b="0">
-                <a:solidFill>
-                  <a:srgbClr val="232B27"/>
-                </a:solidFill>
-                <a:latin typeface="微软雅黑"/>
-                <a:ea typeface="微软雅黑"/>
-              </a:rPr>
-              <a:t>     谁持有、谁已知、依据是什么；非法动作</a:t>
-            </a:r>
-          </a:p>
-          <a:p>
-            <a:pPr>
-              <a:spcAft>
-                <a:spcPts val="800"/>
-              </a:spcAft>
-            </a:pPr>
-            <a:r>
-              <a:rPr sz="1200" b="0">
-                <a:solidFill>
-                  <a:srgbClr val="232B27"/>
-                </a:solidFill>
-                <a:latin typeface="微软雅黑"/>
-                <a:ea typeface="微软雅黑"/>
-              </a:rPr>
-              <a:t>     可见降级并记录原因，不静默改写、不毁整轮</a:t>
+              <a:t>2  看得见 Agent 怎么演</a:t>
+            </a:r>
+          </a:p>
+          <a:p>
+            <a:pPr>
+              <a:spcAft>
+                <a:spcPts val="800"/>
+              </a:spcAft>
+            </a:pPr>
+            <a:r>
+              <a:rPr sz="1150" b="0">
+                <a:solidFill>
+                  <a:srgbClr val="232B27"/>
+                </a:solidFill>
+                <a:latin typeface="微软雅黑"/>
+                <a:ea typeface="微软雅黑"/>
+              </a:rPr>
+              <a:t>     点事件看 提议→检查→最终→状态变化；</a:t>
+            </a:r>
+          </a:p>
+          <a:p>
+            <a:pPr>
+              <a:spcAft>
+                <a:spcPts val="800"/>
+              </a:spcAft>
+            </a:pPr>
+            <a:r>
+              <a:rPr sz="1150" b="0">
+                <a:solidFill>
+                  <a:srgbClr val="232B27"/>
+                </a:solidFill>
+                <a:latin typeface="微软雅黑"/>
+                <a:ea typeface="微软雅黑"/>
+              </a:rPr>
+              <a:t>     说话人/指向线/被对话人三者同时高亮</a:t>
             </a:r>
           </a:p>
           <a:p>
@@ -4028,31 +4028,31 @@
               </a:spcAft>
             </a:pPr>
             <a:r>
-              <a:rPr sz="1200" b="0">
-                <a:solidFill>
-                  <a:srgbClr val="232B27"/>
-                </a:solidFill>
-                <a:latin typeface="微软雅黑"/>
-                <a:ea typeface="微软雅黑"/>
-              </a:rPr>
-              <a:t>     候选→预览→提交（幂等+版本校验）；字段锁定、</a:t>
-            </a:r>
-          </a:p>
-          <a:p>
-            <a:pPr>
-              <a:spcAft>
-                <a:spcPts val="800"/>
-              </a:spcAft>
-            </a:pPr>
-            <a:r>
-              <a:rPr sz="1200" b="0">
-                <a:solidFill>
-                  <a:srgbClr val="232B27"/>
-                </a:solidFill>
-                <a:latin typeface="微软雅黑"/>
-                <a:ea typeface="微软雅黑"/>
-              </a:rPr>
-              <a:t>     导演指令、分支试演；没有自动提交路径</a:t>
+              <a:rPr sz="1150" b="0">
+                <a:solidFill>
+                  <a:srgbClr val="232B27"/>
+                </a:solidFill>
+                <a:latin typeface="微软雅黑"/>
+                <a:ea typeface="微软雅黑"/>
+              </a:rPr>
+              <a:t>     预览→锁定→提交（幂等+版本校验）；</a:t>
+            </a:r>
+          </a:p>
+          <a:p>
+            <a:pPr>
+              <a:spcAft>
+                <a:spcPts val="800"/>
+              </a:spcAft>
+            </a:pPr>
+            <a:r>
+              <a:rPr sz="1150" b="0">
+                <a:solidFill>
+                  <a:srgbClr val="232B27"/>
+                </a:solidFill>
+                <a:latin typeface="微软雅黑"/>
+                <a:ea typeface="微软雅黑"/>
+              </a:rPr>
+              <a:t>     节拍由作者推进，没有自动提交路径</a:t>
             </a:r>
           </a:p>
           <a:p>
@@ -4069,41 +4069,41 @@
                 <a:latin typeface="微软雅黑"/>
                 <a:ea typeface="微软雅黑"/>
               </a:rPr>
-              <a:t>4  真模型 + 真素材</a:t>
-            </a:r>
-          </a:p>
-          <a:p>
-            <a:pPr>
-              <a:spcAft>
-                <a:spcPts val="800"/>
-              </a:spcAft>
-            </a:pPr>
-            <a:r>
-              <a:rPr sz="1200" b="0">
-                <a:solidFill>
-                  <a:srgbClr val="232B27"/>
-                </a:solidFill>
-                <a:latin typeface="微软雅黑"/>
-                <a:ea typeface="微软雅黑"/>
-              </a:rPr>
-              <a:t>     角色候选由真模型生成（source=llm）；背板与</a:t>
-            </a:r>
-          </a:p>
-          <a:p>
-            <a:pPr>
-              <a:spcAft>
-                <a:spcPts val="800"/>
-              </a:spcAft>
-            </a:pPr>
-            <a:r>
-              <a:rPr sz="1200" b="0">
-                <a:solidFill>
-                  <a:srgbClr val="232B27"/>
-                </a:solidFill>
-                <a:latin typeface="微软雅黑"/>
-                <a:ea typeface="微软雅黑"/>
-              </a:rPr>
-              <a:t>     立绘由文生图产出，带提示词/模型/时间戳</a:t>
+              <a:t>4  真模型 + 真素材（来源如实标注）</a:t>
+            </a:r>
+          </a:p>
+          <a:p>
+            <a:pPr>
+              <a:spcAft>
+                <a:spcPts val="800"/>
+              </a:spcAft>
+            </a:pPr>
+            <a:r>
+              <a:rPr sz="1150" b="0">
+                <a:solidFill>
+                  <a:srgbClr val="232B27"/>
+                </a:solidFill>
+                <a:latin typeface="微软雅黑"/>
+                <a:ea typeface="微软雅黑"/>
+              </a:rPr>
+              <a:t>     候选 source=llm；图片带提示词与时间戳；</a:t>
+            </a:r>
+          </a:p>
+          <a:p>
+            <a:pPr>
+              <a:spcAft>
+                <a:spcPts val="800"/>
+              </a:spcAft>
+            </a:pPr>
+            <a:r>
+              <a:rPr sz="1150" b="0">
+                <a:solidFill>
+                  <a:srgbClr val="232B27"/>
+                </a:solidFill>
+                <a:latin typeface="微软雅黑"/>
+                <a:ea typeface="微软雅黑"/>
+              </a:rPr>
+              <a:t>     检查=规则、输出=确定性/润色 均写明</a:t>
             </a:r>
           </a:p>
           <a:p>
@@ -4120,41 +4120,24 @@
                 <a:latin typeface="微软雅黑"/>
                 <a:ea typeface="微软雅黑"/>
               </a:rPr>
-              <a:t>5  一句话生成完整开场</a:t>
-            </a:r>
-          </a:p>
-          <a:p>
-            <a:pPr>
-              <a:spcAft>
-                <a:spcPts val="800"/>
-              </a:spcAft>
-            </a:pPr>
-            <a:r>
-              <a:rPr sz="1200" b="0">
-                <a:solidFill>
-                  <a:srgbClr val="232B27"/>
-                </a:solidFill>
-                <a:latin typeface="微软雅黑"/>
-                <a:ea typeface="微软雅黑"/>
-              </a:rPr>
-              <a:t>     模型产出剧名/区域/角色/道具/事实 + 舞台布局；</a:t>
-            </a:r>
-          </a:p>
-          <a:p>
-            <a:pPr>
-              <a:spcAft>
-                <a:spcPts val="800"/>
-              </a:spcAft>
-            </a:pPr>
-            <a:r>
-              <a:rPr sz="1200" b="0">
-                <a:solidFill>
-                  <a:srgbClr val="232B27"/>
-                </a:solidFill>
-                <a:latin typeface="微软雅黑"/>
-                <a:ea typeface="微软雅黑"/>
-              </a:rPr>
-              <a:t>     华山→室外山景，游轮→驾驶舱，来源如实标注</a:t>
+              <a:t>5  一句话 → 完整开场 + 舞台布局</a:t>
+            </a:r>
+          </a:p>
+          <a:p>
+            <a:pPr>
+              <a:spcAft>
+                <a:spcPts val="800"/>
+              </a:spcAft>
+            </a:pPr>
+            <a:r>
+              <a:rPr sz="1150" b="0">
+                <a:solidFill>
+                  <a:srgbClr val="232B27"/>
+                </a:solidFill>
+                <a:latin typeface="微软雅黑"/>
+                <a:ea typeface="微软雅黑"/>
+              </a:rPr>
+              <a:t>     华山→室外山景，矿洞→岩壁矿车，游轮→驾驶台</a:t>
             </a:r>
           </a:p>
         </p:txBody>
@@ -4187,252 +4170,218 @@
               </a:spcAft>
             </a:pPr>
             <a:r>
-              <a:rPr sz="1300" b="1">
+              <a:rPr sz="1250" b="1">
                 <a:solidFill>
                   <a:srgbClr val="2F6F5B"/>
                 </a:solidFill>
                 <a:latin typeface="微软雅黑"/>
                 <a:ea typeface="微软雅黑"/>
               </a:rPr>
-              <a:t>1  See how agents act</a:t>
-            </a:r>
-          </a:p>
-          <a:p>
-            <a:pPr>
-              <a:spcAft>
-                <a:spcPts val="800"/>
-              </a:spcAft>
-            </a:pPr>
-            <a:r>
-              <a:rPr sz="1100" b="0">
-                <a:solidFill>
-                  <a:srgbClr val="232B27"/>
-                </a:solidFill>
-                <a:latin typeface="微软雅黑"/>
-                <a:ea typeface="微软雅黑"/>
-              </a:rPr>
-              <a:t>     2.5D map + three.js stage; click to see</a:t>
-            </a:r>
-          </a:p>
-          <a:p>
-            <a:pPr>
-              <a:spcAft>
-                <a:spcPts val="800"/>
-              </a:spcAft>
-            </a:pPr>
-            <a:r>
-              <a:rPr sz="1100" b="0">
-                <a:solidFill>
-                  <a:srgbClr val="232B27"/>
-                </a:solidFill>
-                <a:latin typeface="微软雅黑"/>
-                <a:ea typeface="微软雅黑"/>
-              </a:rPr>
-              <a:t>     proposal → fact check → final action</a:t>
-            </a:r>
-          </a:p>
-          <a:p>
-            <a:pPr>
-              <a:spcAft>
-                <a:spcPts val="800"/>
-              </a:spcAft>
-            </a:pPr>
-            <a:r>
-              <a:rPr sz="1300" b="1">
+              <a:t>1  Dramatic structure layer</a:t>
+            </a:r>
+          </a:p>
+          <a:p>
+            <a:pPr>
+              <a:spcAft>
+                <a:spcPts val="800"/>
+              </a:spcAft>
+            </a:pPr>
+            <a:r>
+              <a:rPr sz="1050" b="0">
+                <a:solidFill>
+                  <a:srgbClr val="232B27"/>
+                </a:solidFill>
+                <a:latin typeface="微软雅黑"/>
+                <a:ea typeface="微软雅黑"/>
+              </a:rPr>
+              <a:t>     scene contract + 5 beats + 8 dramatic checks</a:t>
+            </a:r>
+          </a:p>
+          <a:p>
+            <a:pPr>
+              <a:spcAft>
+                <a:spcPts val="800"/>
+              </a:spcAft>
+            </a:pPr>
+            <a:r>
+              <a:rPr sz="1250" b="1">
                 <a:solidFill>
                   <a:srgbClr val="2F6F5B"/>
                 </a:solidFill>
                 <a:latin typeface="微软雅黑"/>
                 <a:ea typeface="微软雅黑"/>
               </a:rPr>
-              <a:t>2  Fact lens</a:t>
-            </a:r>
-          </a:p>
-          <a:p>
-            <a:pPr>
-              <a:spcAft>
-                <a:spcPts val="800"/>
-              </a:spcAft>
-            </a:pPr>
-            <a:r>
-              <a:rPr sz="1100" b="0">
-                <a:solidFill>
-                  <a:srgbClr val="232B27"/>
-                </a:solidFill>
-                <a:latin typeface="微软雅黑"/>
-                <a:ea typeface="微软雅黑"/>
-              </a:rPr>
-              <a:t>     who holds / who knows / on what evidence;</a:t>
-            </a:r>
-          </a:p>
-          <a:p>
-            <a:pPr>
-              <a:spcAft>
-                <a:spcPts val="800"/>
-              </a:spcAft>
-            </a:pPr>
-            <a:r>
-              <a:rPr sz="1100" b="0">
-                <a:solidFill>
-                  <a:srgbClr val="232B27"/>
-                </a:solidFill>
-                <a:latin typeface="微软雅黑"/>
-                <a:ea typeface="微软雅黑"/>
-              </a:rPr>
-              <a:t>     invalid moves degrade visibly, never silently</a:t>
-            </a:r>
-          </a:p>
-          <a:p>
-            <a:pPr>
-              <a:spcAft>
-                <a:spcPts val="800"/>
-              </a:spcAft>
-            </a:pPr>
-            <a:r>
-              <a:rPr sz="1300" b="1">
+              <a:t>2  See how agents act</a:t>
+            </a:r>
+          </a:p>
+          <a:p>
+            <a:pPr>
+              <a:spcAft>
+                <a:spcPts val="800"/>
+              </a:spcAft>
+            </a:pPr>
+            <a:r>
+              <a:rPr sz="1050" b="0">
+                <a:solidFill>
+                  <a:srgbClr val="232B27"/>
+                </a:solidFill>
+                <a:latin typeface="微软雅黑"/>
+                <a:ea typeface="微软雅黑"/>
+              </a:rPr>
+              <a:t>     click an event: proposal → check → final</a:t>
+            </a:r>
+          </a:p>
+          <a:p>
+            <a:pPr>
+              <a:spcAft>
+                <a:spcPts val="800"/>
+              </a:spcAft>
+            </a:pPr>
+            <a:r>
+              <a:rPr sz="1050" b="0">
+                <a:solidFill>
+                  <a:srgbClr val="232B27"/>
+                </a:solidFill>
+                <a:latin typeface="微软雅黑"/>
+                <a:ea typeface="微软雅黑"/>
+              </a:rPr>
+              <a:t>     speaker, talk line and addressee all highlight</a:t>
+            </a:r>
+          </a:p>
+          <a:p>
+            <a:pPr>
+              <a:spcAft>
+                <a:spcPts val="800"/>
+              </a:spcAft>
+            </a:pPr>
+            <a:r>
+              <a:rPr sz="1250" b="1">
                 <a:solidFill>
                   <a:srgbClr val="2F6F5B"/>
                 </a:solidFill>
                 <a:latin typeface="微软雅黑"/>
                 <a:ea typeface="微软雅黑"/>
               </a:rPr>
-              <a:t>3  Author stays in control</a:t>
-            </a:r>
-          </a:p>
-          <a:p>
-            <a:pPr>
-              <a:spcAft>
-                <a:spcPts val="800"/>
-              </a:spcAft>
-            </a:pPr>
-            <a:r>
-              <a:rPr sz="1100" b="0">
-                <a:solidFill>
-                  <a:srgbClr val="232B27"/>
-                </a:solidFill>
-                <a:latin typeface="微软雅黑"/>
-                <a:ea typeface="微软雅黑"/>
-              </a:rPr>
-              <a:t>     draft → preview → commit (idempotent,</a:t>
-            </a:r>
-          </a:p>
-          <a:p>
-            <a:pPr>
-              <a:spcAft>
-                <a:spcPts val="800"/>
-              </a:spcAft>
-            </a:pPr>
-            <a:r>
-              <a:rPr sz="1100" b="0">
-                <a:solidFill>
-                  <a:srgbClr val="232B27"/>
-                </a:solidFill>
-                <a:latin typeface="微软雅黑"/>
-                <a:ea typeface="微软雅黑"/>
-              </a:rPr>
-              <a:t>     revision-checked); locks, directives, branches</a:t>
-            </a:r>
-          </a:p>
-          <a:p>
-            <a:pPr>
-              <a:spcAft>
-                <a:spcPts val="800"/>
-              </a:spcAft>
-            </a:pPr>
-            <a:r>
-              <a:rPr sz="1300" b="1">
+              <a:t>3  The author stays in control</a:t>
+            </a:r>
+          </a:p>
+          <a:p>
+            <a:pPr>
+              <a:spcAft>
+                <a:spcPts val="800"/>
+              </a:spcAft>
+            </a:pPr>
+            <a:r>
+              <a:rPr sz="1050" b="0">
+                <a:solidFill>
+                  <a:srgbClr val="232B27"/>
+                </a:solidFill>
+                <a:latin typeface="微软雅黑"/>
+                <a:ea typeface="微软雅黑"/>
+              </a:rPr>
+              <a:t>     preview → lock → commit; beats advance only</a:t>
+            </a:r>
+          </a:p>
+          <a:p>
+            <a:pPr>
+              <a:spcAft>
+                <a:spcPts val="800"/>
+              </a:spcAft>
+            </a:pPr>
+            <a:r>
+              <a:rPr sz="1050" b="0">
+                <a:solidFill>
+                  <a:srgbClr val="232B27"/>
+                </a:solidFill>
+                <a:latin typeface="微软雅黑"/>
+                <a:ea typeface="微软雅黑"/>
+              </a:rPr>
+              <a:t>     when the author says so; no auto-commit</a:t>
+            </a:r>
+          </a:p>
+          <a:p>
+            <a:pPr>
+              <a:spcAft>
+                <a:spcPts val="800"/>
+              </a:spcAft>
+            </a:pPr>
+            <a:r>
+              <a:rPr sz="1250" b="1">
                 <a:solidFill>
                   <a:srgbClr val="2F6F5B"/>
                 </a:solidFill>
                 <a:latin typeface="微软雅黑"/>
                 <a:ea typeface="微软雅黑"/>
               </a:rPr>
-              <a:t>4  Real model, real assets</a:t>
-            </a:r>
-          </a:p>
-          <a:p>
-            <a:pPr>
-              <a:spcAft>
-                <a:spcPts val="800"/>
-              </a:spcAft>
-            </a:pPr>
-            <a:r>
-              <a:rPr sz="1100" b="0">
-                <a:solidFill>
-                  <a:srgbClr val="232B27"/>
-                </a:solidFill>
-                <a:latin typeface="微软雅黑"/>
-                <a:ea typeface="微软雅黑"/>
-              </a:rPr>
-              <a:t>     live LLM candidates (source=llm); text-to-image</a:t>
-            </a:r>
-          </a:p>
-          <a:p>
-            <a:pPr>
-              <a:spcAft>
-                <a:spcPts val="800"/>
-              </a:spcAft>
-            </a:pPr>
-            <a:r>
-              <a:rPr sz="1100" b="0">
-                <a:solidFill>
-                  <a:srgbClr val="232B27"/>
-                </a:solidFill>
-                <a:latin typeface="微软雅黑"/>
-                <a:ea typeface="微软雅黑"/>
-              </a:rPr>
-              <a:t>     backdrops and portraits with provenance</a:t>
-            </a:r>
-          </a:p>
-          <a:p>
-            <a:pPr>
-              <a:spcAft>
-                <a:spcPts val="800"/>
-              </a:spcAft>
-            </a:pPr>
-            <a:r>
-              <a:rPr sz="1300" b="1">
+              <a:t>4  Real model, real assets, honest labels</a:t>
+            </a:r>
+          </a:p>
+          <a:p>
+            <a:pPr>
+              <a:spcAft>
+                <a:spcPts val="800"/>
+              </a:spcAft>
+            </a:pPr>
+            <a:r>
+              <a:rPr sz="1050" b="0">
+                <a:solidFill>
+                  <a:srgbClr val="232B27"/>
+                </a:solidFill>
+                <a:latin typeface="微软雅黑"/>
+                <a:ea typeface="微软雅黑"/>
+              </a:rPr>
+              <a:t>     candidates source=llm; images with prompts/time;</a:t>
+            </a:r>
+          </a:p>
+          <a:p>
+            <a:pPr>
+              <a:spcAft>
+                <a:spcPts val="800"/>
+              </a:spcAft>
+            </a:pPr>
+            <a:r>
+              <a:rPr sz="1050" b="0">
+                <a:solidFill>
+                  <a:srgbClr val="232B27"/>
+                </a:solidFill>
+                <a:latin typeface="微软雅黑"/>
+                <a:ea typeface="微软雅黑"/>
+              </a:rPr>
+              <a:t>     checks = rules; outputs labelled deterministic</a:t>
+            </a:r>
+          </a:p>
+          <a:p>
+            <a:pPr>
+              <a:spcAft>
+                <a:spcPts val="800"/>
+              </a:spcAft>
+            </a:pPr>
+            <a:r>
+              <a:rPr sz="1250" b="1">
                 <a:solidFill>
                   <a:srgbClr val="2F6F5B"/>
                 </a:solidFill>
                 <a:latin typeface="微软雅黑"/>
                 <a:ea typeface="微软雅黑"/>
               </a:rPr>
-              <a:t>5  One line to a full opening</a:t>
-            </a:r>
-          </a:p>
-          <a:p>
-            <a:pPr>
-              <a:spcAft>
-                <a:spcPts val="800"/>
-              </a:spcAft>
-            </a:pPr>
-            <a:r>
-              <a:rPr sz="1100" b="0">
-                <a:solidFill>
-                  <a:srgbClr val="232B27"/>
-                </a:solidFill>
-                <a:latin typeface="微软雅黑"/>
-                <a:ea typeface="微软雅黑"/>
-              </a:rPr>
-              <a:t>     title, areas, cast, props, facts + stage layout;</a:t>
-            </a:r>
-          </a:p>
-          <a:p>
-            <a:pPr>
-              <a:spcAft>
-                <a:spcPts val="800"/>
-              </a:spcAft>
-            </a:pPr>
-            <a:r>
-              <a:rPr sz="1100" b="0">
-                <a:solidFill>
-                  <a:srgbClr val="232B27"/>
-                </a:solidFill>
-                <a:latin typeface="微软雅黑"/>
-                <a:ea typeface="微软雅黑"/>
-              </a:rPr>
-              <a:t>     mountain vs ship bridge, source labelled</a:t>
+              <a:t>5  One line → opening + stage layout</a:t>
+            </a:r>
+          </a:p>
+          <a:p>
+            <a:pPr>
+              <a:spcAft>
+                <a:spcPts val="800"/>
+              </a:spcAft>
+            </a:pPr>
+            <a:r>
+              <a:rPr sz="1050" b="0">
+                <a:solidFill>
+                  <a:srgbClr val="232B27"/>
+                </a:solidFill>
+                <a:latin typeface="微软雅黑"/>
+                <a:ea typeface="微软雅黑"/>
+              </a:rPr>
+              <a:t>     mountain / mine / ship bridge adapt per genre</a:t>
             </a:r>
           </a:p>
         </p:txBody>
